--- a/soulia/graphs/boxplot_asat_score_fibrose.pptx
+++ b/soulia/graphs/boxplot_asat_score_fibrose.pptx
@@ -8177,7 +8177,7 @@
           <p:spPr>
             <a:xfrm>
               <a:off x="7709012" y="3690482"/>
-              <a:ext cx="219455" cy="219455"/>
+              <a:ext cx="219455" cy="219456"/>
             </a:xfrm>
             <a:prstGeom prst="rect">
               <a:avLst/>
@@ -8539,7 +8539,7 @@
           <p:spPr>
             <a:xfrm>
               <a:off x="7709012" y="4129394"/>
-              <a:ext cx="219455" cy="219456"/>
+              <a:ext cx="219455" cy="219455"/>
             </a:xfrm>
             <a:prstGeom prst="rect">
               <a:avLst/>
@@ -8720,7 +8720,7 @@
           <p:spPr>
             <a:xfrm>
               <a:off x="7709012" y="4348850"/>
-              <a:ext cx="219455" cy="219455"/>
+              <a:ext cx="219455" cy="219456"/>
             </a:xfrm>
             <a:prstGeom prst="rect">
               <a:avLst/>

--- a/soulia/graphs/boxplot_asat_score_fibrose.pptx
+++ b/soulia/graphs/boxplot_asat_score_fibrose.pptx
@@ -8177,7 +8177,7 @@
           <p:spPr>
             <a:xfrm>
               <a:off x="7709012" y="3690482"/>
-              <a:ext cx="219455" cy="219456"/>
+              <a:ext cx="219455" cy="219455"/>
             </a:xfrm>
             <a:prstGeom prst="rect">
               <a:avLst/>
@@ -8539,7 +8539,7 @@
           <p:spPr>
             <a:xfrm>
               <a:off x="7709012" y="4129394"/>
-              <a:ext cx="219455" cy="219455"/>
+              <a:ext cx="219455" cy="219456"/>
             </a:xfrm>
             <a:prstGeom prst="rect">
               <a:avLst/>
@@ -8720,7 +8720,7 @@
           <p:spPr>
             <a:xfrm>
               <a:off x="7709012" y="4348850"/>
-              <a:ext cx="219455" cy="219456"/>
+              <a:ext cx="219455" cy="219455"/>
             </a:xfrm>
             <a:prstGeom prst="rect">
               <a:avLst/>
